--- a/slides/Aula_17_Manutencao.pptx
+++ b/slides/Aula_17_Manutencao.pptx
@@ -3334,7 +3334,7 @@
               </a:defRPr>
             </a:pPr>
             <a:r>
-              <a:t>Prof. [Seu Nome]  |  Duração: 100 min</a:t>
+              <a:t>Prof. Luis Vasconcelos  |  Duração: 100 min</a:t>
             </a:r>
           </a:p>
         </p:txBody>
